--- a/dist/초4/수학/자료와규칙/초4_수학_자료와규칙_01_막대그래프.pptx
+++ b/dist/초4/수학/자료와규칙/초4_수학_자료와규칙_01_막대그래프.pptx
@@ -120,13 +120,13 @@
   <p:extLst>
     <p:ext uri="{521415D9-36F7-43E2-AB2F-B90AF26B5E84}">
       <p14:sectionLst xmlns:p14="http://schemas.microsoft.com/office/powerpoint/2010/main">
-        <p14:section name="도입" id="{d4bfac2a-7818-a48e-f1e7-6e0efa1034c4}">
+        <p14:section name="도입" id="{66fffa56-5deb-ebc0-9ad7-bb4adcd29bb1}">
           <p14:sldIdLst>
             <p14:sldId id="256"/>
             <p14:sldId id="257"/>
           </p14:sldIdLst>
         </p14:section>
-        <p14:section name="개념" id="{450c4d2e-d4ca-ff0d-b9f3-30f7665c1c82}">
+        <p14:section name="개념" id="{3ae25bf8-16c1-be75-70da-14023bb711b5}">
           <p14:sldIdLst>
             <p14:sldId id="258"/>
             <p14:sldId id="259"/>
@@ -134,32 +134,32 @@
             <p14:sldId id="263"/>
           </p14:sldIdLst>
         </p14:section>
-        <p14:section name="연습" id="{61c5f9af-ad51-b22d-d80e-7a48de567610}">
+        <p14:section name="연습" id="{95a8f3c6-1c73-686f-c179-fd76bb2b721b}">
           <p14:sldIdLst>
             <p14:sldId id="261"/>
             <p14:sldId id="262"/>
             <p14:sldId id="264"/>
           </p14:sldIdLst>
         </p14:section>
-        <p14:section name="개념" id="{a55d0a7d-3463-003e-5e86-8dc92e806337}">
+        <p14:section name="개념" id="{bcbe6409-a765-02cf-35db-e0c5dee38c8e}">
           <p14:sldIdLst/>
         </p14:section>
-        <p14:section name="연습" id="{0cd9012c-102e-0afe-3ff6-aeaf0d999a78}">
+        <p14:section name="연습" id="{53ba7be3-9158-dbc2-7028-5ee0ec012adf}">
           <p14:sldIdLst/>
         </p14:section>
-        <p14:section name="확인" id="{13e0de32-ae7b-1394-768f-d1bdadcceb6a}">
+        <p14:section name="확인" id="{1a4a758f-ee03-8b33-233f-e840272cb7cc}">
           <p14:sldIdLst>
             <p14:sldId id="265"/>
             <p14:sldId id="266"/>
             <p14:sldId id="267"/>
           </p14:sldIdLst>
         </p14:section>
-        <p14:section name="정리" id="{6d7937bf-d851-c338-fb19-efa430719db5}">
+        <p14:section name="정리" id="{43a74ba5-4d0e-9090-4af1-e327da747022}">
           <p14:sldIdLst>
             <p14:sldId id="268"/>
           </p14:sldIdLst>
         </p14:section>
-        <p14:section name="보충" id="{54fd61a7-8d2b-8bdc-95f9-5a3cde40fd8e}">
+        <p14:section name="보충" id="{53b211f6-95be-2183-6592-af916a50aebc}">
           <p14:sldIdLst>
             <p14:sldId id="269"/>
           </p14:sldIdLst>
